--- a/dissertation_presentation_v2.pptx
+++ b/dissertation_presentation_v2.pptx
@@ -256,7 +256,7 @@
   </p:defaultTextStyle>
   <p:extLst>
     <p:ext uri="GoogleSlidesCustomDataVersion2">
-      <go:slidesCustomData xmlns:go="http://customooxmlschemas.google.com/" r:id="rId20" roundtripDataSignature="AMtx7mjdVmygxm1PZSyzGyamHYs1LfiqZA=="/>
+      <go:slidesCustomData xmlns:go="http://customooxmlschemas.google.com/" r:id="rId20" roundtripDataSignature="AMtx7mgd08u2QciKBgPjs3/L5vnz8tP0NQ=="/>
     </p:ext>
   </p:extLst>
 </p:presentation>
@@ -1688,7 +1688,11 @@
             </a:pPr>
             <a:r>
               <a:rPr lang="en-US"/>
-              <a:t>Three sensitivity tests support the main finding. K stable at 20-30%. Cap robust at 20-40%. S3 confirms tier mechanism is key.</a:t>
+              <a:t>Three sensitivity tests support the main finding. K stable at 20-30%. Cap robust at 20-40%. </a:t>
+            </a:r>
+            <a:r>
+              <a:rPr lang="en-US"/>
+              <a:t>S3 shows that the qualification signal carries some value, but the tier-based prioritisation mechanism generates the larger improvement.</a:t>
             </a:r>
             <a:endParaRPr/>
           </a:p>
@@ -1846,7 +1850,7 @@
             </a:pPr>
             <a:r>
               <a:rPr lang="en-US"/>
-              <a:t>Tier locates the seam. ML removes the duds. Neither works alone. The tier cap decay proves this: gain vanishes above 40% cap.</a:t>
+              <a:t>The qualification layer identifies groups with unusually high conversion rates that are not fully visible to the model at scoring time. The signal matters, but the larger gain comes from how the information is applied.</a:t>
             </a:r>
             <a:endParaRPr/>
           </a:p>
@@ -1909,7 +1913,7 @@
   <p:cSld>
     <p:spTree>
       <p:nvGrpSpPr>
-        <p:cNvPr id="193" name="Shape 193"/>
+        <p:cNvPr id="194" name="Shape 194"/>
         <p:cNvGrpSpPr/>
         <p:nvPr/>
       </p:nvGrpSpPr>
@@ -1923,7 +1927,7 @@
       </p:grpSpPr>
       <p:sp>
         <p:nvSpPr>
-          <p:cNvPr id="194" name="Google Shape;194;p13:notes"/>
+          <p:cNvPr id="195" name="Google Shape;195;p13:notes"/>
           <p:cNvSpPr/>
           <p:nvPr>
             <p:ph idx="2" type="sldImg"/>
@@ -1968,7 +1972,7 @@
       </p:sp>
       <p:sp>
         <p:nvSpPr>
-          <p:cNvPr id="195" name="Google Shape;195;p13:notes"/>
+          <p:cNvPr id="196" name="Google Shape;196;p13:notes"/>
           <p:cNvSpPr txBox="1"/>
           <p:nvPr>
             <p:ph idx="1" type="body"/>
@@ -2012,7 +2016,7 @@
       </p:sp>
       <p:sp>
         <p:nvSpPr>
-          <p:cNvPr id="196" name="Google Shape;196;p13:notes"/>
+          <p:cNvPr id="197" name="Google Shape;197;p13:notes"/>
           <p:cNvSpPr txBox="1"/>
           <p:nvPr>
             <p:ph idx="12" type="sldNum"/>
@@ -2067,7 +2071,7 @@
   <p:cSld>
     <p:spTree>
       <p:nvGrpSpPr>
-        <p:cNvPr id="210" name="Shape 210"/>
+        <p:cNvPr id="211" name="Shape 211"/>
         <p:cNvGrpSpPr/>
         <p:nvPr/>
       </p:nvGrpSpPr>
@@ -2081,7 +2085,7 @@
       </p:grpSpPr>
       <p:sp>
         <p:nvSpPr>
-          <p:cNvPr id="211" name="Google Shape;211;p14:notes"/>
+          <p:cNvPr id="212" name="Google Shape;212;p14:notes"/>
           <p:cNvSpPr/>
           <p:nvPr>
             <p:ph idx="2" type="sldImg"/>
@@ -2126,7 +2130,7 @@
       </p:sp>
       <p:sp>
         <p:nvSpPr>
-          <p:cNvPr id="212" name="Google Shape;212;p14:notes"/>
+          <p:cNvPr id="213" name="Google Shape;213;p14:notes"/>
           <p:cNvSpPr txBox="1"/>
           <p:nvPr>
             <p:ph idx="1" type="body"/>
@@ -2170,7 +2174,7 @@
       </p:sp>
       <p:sp>
         <p:nvSpPr>
-          <p:cNvPr id="213" name="Google Shape;213;p14:notes"/>
+          <p:cNvPr id="214" name="Google Shape;214;p14:notes"/>
           <p:cNvSpPr txBox="1"/>
           <p:nvPr>
             <p:ph idx="12" type="sldNum"/>
@@ -2225,7 +2229,7 @@
   <p:cSld>
     <p:spTree>
       <p:nvGrpSpPr>
-        <p:cNvPr id="223" name="Shape 223"/>
+        <p:cNvPr id="224" name="Shape 224"/>
         <p:cNvGrpSpPr/>
         <p:nvPr/>
       </p:nvGrpSpPr>
@@ -2239,7 +2243,7 @@
       </p:grpSpPr>
       <p:sp>
         <p:nvSpPr>
-          <p:cNvPr id="224" name="Google Shape;224;p15:notes"/>
+          <p:cNvPr id="225" name="Google Shape;225;p15:notes"/>
           <p:cNvSpPr/>
           <p:nvPr>
             <p:ph idx="2" type="sldImg"/>
@@ -2284,7 +2288,7 @@
       </p:sp>
       <p:sp>
         <p:nvSpPr>
-          <p:cNvPr id="225" name="Google Shape;225;p15:notes"/>
+          <p:cNvPr id="226" name="Google Shape;226;p15:notes"/>
           <p:cNvSpPr txBox="1"/>
           <p:nvPr>
             <p:ph idx="1" type="body"/>
@@ -2327,7 +2331,7 @@
       </p:sp>
       <p:sp>
         <p:nvSpPr>
-          <p:cNvPr id="226" name="Google Shape;226;p15:notes"/>
+          <p:cNvPr id="227" name="Google Shape;227;p15:notes"/>
           <p:cNvSpPr txBox="1"/>
           <p:nvPr>
             <p:ph idx="12" type="sldNum"/>
@@ -5518,8 +5522,8 @@
         </p:nvSpPr>
         <p:spPr>
           <a:xfrm>
-            <a:off x="731520" y="3474720"/>
-            <a:ext cx="7680960" cy="1051560"/>
+            <a:off x="731525" y="3474726"/>
+            <a:ext cx="7680900" cy="1236600"/>
           </a:xfrm>
           <a:prstGeom prst="roundRect">
             <a:avLst>
@@ -5634,7 +5638,7 @@
         <p:spPr>
           <a:xfrm>
             <a:off x="914400" y="3886200"/>
-            <a:ext cx="4572000" cy="594360"/>
+            <a:ext cx="4572000" cy="825000"/>
           </a:xfrm>
           <a:prstGeom prst="rect">
             <a:avLst/>
@@ -5687,6 +5691,117 @@
             </a:endParaRPr>
           </a:p>
           <a:p>
+            <a:pPr indent="0" lvl="0" marL="0" rtl="0" algn="l">
+              <a:spcBef>
+                <a:spcPts val="0"/>
+              </a:spcBef>
+              <a:spcAft>
+                <a:spcPts val="0"/>
+              </a:spcAft>
+              <a:buClr>
+                <a:schemeClr val="dk1"/>
+              </a:buClr>
+              <a:buSzPts val="1100"/>
+              <a:buFont typeface="Arial"/>
+              <a:buNone/>
+            </a:pPr>
+            <a:r>
+              <a:rPr lang="en-US" sz="1200">
+                <a:solidFill>
+                  <a:srgbClr val="0F1B3D"/>
+                </a:solidFill>
+                <a:latin typeface="Calibri"/>
+                <a:ea typeface="Calibri"/>
+                <a:cs typeface="Calibri"/>
+                <a:sym typeface="Calibri"/>
+              </a:rPr>
+              <a:t>Blend produces a small improvement</a:t>
+            </a:r>
+            <a:endParaRPr sz="1200">
+              <a:solidFill>
+                <a:srgbClr val="0F1B3D"/>
+              </a:solidFill>
+              <a:latin typeface="Calibri"/>
+              <a:ea typeface="Calibri"/>
+              <a:cs typeface="Calibri"/>
+              <a:sym typeface="Calibri"/>
+            </a:endParaRPr>
+          </a:p>
+          <a:p>
+            <a:pPr indent="0" lvl="0" marL="0" rtl="0" algn="l">
+              <a:spcBef>
+                <a:spcPts val="0"/>
+              </a:spcBef>
+              <a:spcAft>
+                <a:spcPts val="0"/>
+              </a:spcAft>
+              <a:buClr>
+                <a:schemeClr val="dk1"/>
+              </a:buClr>
+              <a:buSzPts val="1100"/>
+              <a:buFont typeface="Arial"/>
+              <a:buNone/>
+            </a:pPr>
+            <a:r>
+              <a:rPr lang="en-US" sz="1200">
+                <a:solidFill>
+                  <a:srgbClr val="0F1B3D"/>
+                </a:solidFill>
+                <a:latin typeface="Calibri"/>
+                <a:ea typeface="Calibri"/>
+                <a:cs typeface="Calibri"/>
+                <a:sym typeface="Calibri"/>
+              </a:rPr>
+              <a:t>over baseline across tested weights,</a:t>
+            </a:r>
+            <a:endParaRPr sz="1200">
+              <a:solidFill>
+                <a:srgbClr val="0F1B3D"/>
+              </a:solidFill>
+              <a:latin typeface="Calibri"/>
+              <a:ea typeface="Calibri"/>
+              <a:cs typeface="Calibri"/>
+              <a:sym typeface="Calibri"/>
+            </a:endParaRPr>
+          </a:p>
+          <a:p>
+            <a:pPr indent="0" lvl="0" marL="0" rtl="0" algn="l">
+              <a:spcBef>
+                <a:spcPts val="0"/>
+              </a:spcBef>
+              <a:spcAft>
+                <a:spcPts val="0"/>
+              </a:spcAft>
+              <a:buClr>
+                <a:schemeClr val="dk1"/>
+              </a:buClr>
+              <a:buSzPts val="1100"/>
+              <a:buFont typeface="Arial"/>
+              <a:buNone/>
+            </a:pPr>
+            <a:r>
+              <a:rPr lang="en-US" sz="1200">
+                <a:solidFill>
+                  <a:srgbClr val="0F1B3D"/>
+                </a:solidFill>
+                <a:latin typeface="Calibri"/>
+                <a:ea typeface="Calibri"/>
+                <a:cs typeface="Calibri"/>
+                <a:sym typeface="Calibri"/>
+              </a:rPr>
+              <a:t>but remains materially below System 2.</a:t>
+            </a:r>
+            <a:endParaRPr sz="1200">
+              <a:solidFill>
+                <a:srgbClr val="0F1B3D"/>
+              </a:solidFill>
+              <a:latin typeface="Calibri"/>
+              <a:ea typeface="Calibri"/>
+              <a:cs typeface="Calibri"/>
+              <a:sym typeface="Calibri"/>
+            </a:endParaRPr>
+          </a:p>
+          <a:p>
             <a:pPr indent="0" lvl="0" marL="0" marR="0" rtl="0" algn="l">
               <a:spcBef>
                 <a:spcPts val="0"/>
@@ -5702,57 +5817,11 @@
               <a:buNone/>
             </a:pPr>
             <a:r>
-              <a:rPr b="0" i="0" lang="en-US" sz="1200" u="none" cap="none" strike="noStrike">
-                <a:solidFill>
-                  <a:srgbClr val="0F1B3D"/>
-                </a:solidFill>
-                <a:latin typeface="Calibri"/>
-                <a:ea typeface="Calibri"/>
-                <a:cs typeface="Calibri"/>
-                <a:sym typeface="Calibri"/>
-              </a:rPr>
-              <a:t>Blend does not improve on baseline</a:t>
-            </a:r>
-            <a:endParaRPr b="0" i="0" sz="1200" u="none" cap="none" strike="noStrike">
-              <a:solidFill>
-                <a:schemeClr val="dk1"/>
-              </a:solidFill>
-              <a:latin typeface="Calibri"/>
-              <a:ea typeface="Calibri"/>
-              <a:cs typeface="Calibri"/>
-              <a:sym typeface="Calibri"/>
-            </a:endParaRPr>
-          </a:p>
-          <a:p>
-            <a:pPr indent="0" lvl="0" marL="0" marR="0" rtl="0" algn="l">
-              <a:spcBef>
-                <a:spcPts val="0"/>
-              </a:spcBef>
-              <a:spcAft>
-                <a:spcPts val="0"/>
-              </a:spcAft>
-              <a:buClr>
+              <a:t/>
+            </a:r>
+            <a:endParaRPr sz="1200">
+              <a:solidFill>
                 <a:srgbClr val="0F1B3D"/>
-              </a:buClr>
-              <a:buSzPts val="1200"/>
-              <a:buFont typeface="Calibri"/>
-              <a:buNone/>
-            </a:pPr>
-            <a:r>
-              <a:rPr b="0" i="0" lang="en-US" sz="1200" u="none" cap="none" strike="noStrike">
-                <a:solidFill>
-                  <a:srgbClr val="0F1B3D"/>
-                </a:solidFill>
-                <a:latin typeface="Calibri"/>
-                <a:ea typeface="Calibri"/>
-                <a:cs typeface="Calibri"/>
-                <a:sym typeface="Calibri"/>
-              </a:rPr>
-              <a:t>regardless of weight.</a:t>
-            </a:r>
-            <a:endParaRPr b="0" i="0" sz="1200" u="none" cap="none" strike="noStrike">
-              <a:solidFill>
-                <a:schemeClr val="dk1"/>
               </a:solidFill>
               <a:latin typeface="Calibri"/>
               <a:ea typeface="Calibri"/>
@@ -6049,7 +6118,7 @@
               <a:buNone/>
             </a:pPr>
             <a:r>
-              <a:rPr b="1" i="0" lang="en-US" sz="1500" u="none" cap="none" strike="noStrike">
+              <a:rPr b="1" lang="en-US" sz="1500">
                 <a:solidFill>
                   <a:srgbClr val="E8593C"/>
                 </a:solidFill>
@@ -6058,7 +6127,7 @@
                 <a:cs typeface="Calibri"/>
                 <a:sym typeface="Calibri"/>
               </a:rPr>
-              <a:t>Qualification finds the high-conversion pocket</a:t>
+              <a:t>Qualification identifies high-conversion pockets</a:t>
             </a:r>
             <a:endParaRPr b="0" i="0" sz="1500" u="none" cap="none" strike="noStrike">
               <a:solidFill>
@@ -6540,6 +6609,80 @@
               <a:cs typeface="Calibri"/>
               <a:sym typeface="Calibri"/>
             </a:endParaRPr>
+          </a:p>
+        </p:txBody>
+      </p:sp>
+      <p:sp>
+        <p:nvSpPr>
+          <p:cNvPr id="193" name="Google Shape;193;p12"/>
+          <p:cNvSpPr/>
+          <p:nvPr/>
+        </p:nvSpPr>
+        <p:spPr>
+          <a:xfrm>
+            <a:off x="312950" y="4572000"/>
+            <a:ext cx="8448900" cy="457200"/>
+          </a:xfrm>
+          <a:prstGeom prst="roundRect">
+            <a:avLst>
+              <a:gd fmla="val 8696" name="adj"/>
+            </a:avLst>
+          </a:prstGeom>
+          <a:solidFill>
+            <a:srgbClr val="F2F4F8"/>
+          </a:solidFill>
+          <a:ln>
+            <a:noFill/>
+          </a:ln>
+          <a:effectLst>
+            <a:outerShdw blurRad="76200" rotWithShape="0" algn="bl" dir="2700000" dist="25400">
+              <a:srgbClr val="000000">
+                <a:alpha val="10199"/>
+              </a:srgbClr>
+            </a:outerShdw>
+          </a:effectLst>
+        </p:spPr>
+        <p:txBody>
+          <a:bodyPr anchorCtr="0" anchor="ctr" bIns="91425" lIns="91425" spcFirstLastPara="1" rIns="91425" wrap="square" tIns="91425">
+            <a:noAutofit/>
+          </a:bodyPr>
+          <a:lstStyle/>
+          <a:p>
+            <a:pPr indent="0" lvl="0" marL="0" rtl="0" algn="l">
+              <a:spcBef>
+                <a:spcPts val="0"/>
+              </a:spcBef>
+              <a:spcAft>
+                <a:spcPts val="0"/>
+              </a:spcAft>
+              <a:buClr>
+                <a:schemeClr val="dk1"/>
+              </a:buClr>
+              <a:buSzPts val="1100"/>
+              <a:buFont typeface="Arial"/>
+              <a:buNone/>
+            </a:pPr>
+            <a:r>
+              <a:rPr lang="en-US" sz="900"/>
+              <a:t>System 3 shows the signal contains useful information.</a:t>
+            </a:r>
+            <a:endParaRPr sz="900"/>
+          </a:p>
+          <a:p>
+            <a:pPr indent="0" lvl="0" marL="0" rtl="0" algn="l">
+              <a:spcBef>
+                <a:spcPts val="0"/>
+              </a:spcBef>
+              <a:spcAft>
+                <a:spcPts val="0"/>
+              </a:spcAft>
+              <a:buNone/>
+            </a:pPr>
+            <a:r>
+              <a:rPr lang="en-US" sz="900"/>
+              <a:t>System 2 shows that explicitly prioritising those groups is more effective than simply adjusting scores.</a:t>
+            </a:r>
+            <a:endParaRPr sz="900"/>
           </a:p>
         </p:txBody>
       </p:sp>
@@ -6563,7 +6706,7 @@
     </p:bg>
     <p:spTree>
       <p:nvGrpSpPr>
-        <p:cNvPr id="197" name="Shape 197"/>
+        <p:cNvPr id="198" name="Shape 198"/>
         <p:cNvGrpSpPr/>
         <p:nvPr/>
       </p:nvGrpSpPr>
@@ -6577,7 +6720,7 @@
       </p:grpSpPr>
       <p:pic>
         <p:nvPicPr>
-          <p:cNvPr descr="preencoded.png" id="198" name="Google Shape;198;p13"/>
+          <p:cNvPr descr="preencoded.png" id="199" name="Google Shape;199;p13"/>
           <p:cNvPicPr preferRelativeResize="0"/>
           <p:nvPr/>
         </p:nvPicPr>
@@ -6604,7 +6747,7 @@
       </p:pic>
       <p:sp>
         <p:nvSpPr>
-          <p:cNvPr id="199" name="Google Shape;199;p13"/>
+          <p:cNvPr id="200" name="Google Shape;200;p13"/>
           <p:cNvSpPr/>
           <p:nvPr/>
         </p:nvSpPr>
@@ -6667,7 +6810,7 @@
       </p:sp>
       <p:sp>
         <p:nvSpPr>
-          <p:cNvPr id="200" name="Google Shape;200;p13"/>
+          <p:cNvPr id="201" name="Google Shape;201;p13"/>
           <p:cNvSpPr/>
           <p:nvPr/>
         </p:nvSpPr>
@@ -6710,7 +6853,7 @@
       </p:sp>
       <p:sp>
         <p:nvSpPr>
-          <p:cNvPr id="201" name="Google Shape;201;p13"/>
+          <p:cNvPr id="202" name="Google Shape;202;p13"/>
           <p:cNvSpPr/>
           <p:nvPr/>
         </p:nvSpPr>
@@ -6834,7 +6977,7 @@
       </p:sp>
       <p:sp>
         <p:nvSpPr>
-          <p:cNvPr id="202" name="Google Shape;202;p13"/>
+          <p:cNvPr id="203" name="Google Shape;203;p13"/>
           <p:cNvSpPr/>
           <p:nvPr/>
         </p:nvSpPr>
@@ -6877,7 +7020,7 @@
       </p:sp>
       <p:sp>
         <p:nvSpPr>
-          <p:cNvPr id="203" name="Google Shape;203;p13"/>
+          <p:cNvPr id="204" name="Google Shape;204;p13"/>
           <p:cNvSpPr/>
           <p:nvPr/>
         </p:nvSpPr>
@@ -6900,22 +7043,59 @@
           </a:bodyPr>
           <a:lstStyle/>
           <a:p>
-            <a:pPr indent="0" lvl="0" marL="0" marR="0" rtl="0" algn="l">
-              <a:spcBef>
-                <a:spcPts val="0"/>
-              </a:spcBef>
-              <a:spcAft>
-                <a:spcPts val="0"/>
-              </a:spcAft>
-              <a:buClr>
+            <a:pPr indent="0" lvl="0" marL="0" rtl="0" algn="l">
+              <a:spcBef>
+                <a:spcPts val="0"/>
+              </a:spcBef>
+              <a:spcAft>
+                <a:spcPts val="0"/>
+              </a:spcAft>
+              <a:buClr>
+                <a:schemeClr val="dk1"/>
+              </a:buClr>
+              <a:buSzPts val="1100"/>
+              <a:buFont typeface="Arial"/>
+              <a:buNone/>
+            </a:pPr>
+            <a:r>
+              <a:rPr lang="en-US" sz="1300">
+                <a:solidFill>
+                  <a:srgbClr val="FFFFFF"/>
+                </a:solidFill>
+                <a:latin typeface="Calibri"/>
+                <a:ea typeface="Calibri"/>
+                <a:cs typeface="Calibri"/>
+                <a:sym typeface="Calibri"/>
+              </a:rPr>
+              <a:t>The improvement is directional (+1.7 pp, 5 additional converters) and</a:t>
+            </a:r>
+            <a:endParaRPr sz="1300">
+              <a:solidFill>
                 <a:srgbClr val="FFFFFF"/>
-              </a:buClr>
-              <a:buSzPts val="1300"/>
-              <a:buFont typeface="Calibri"/>
-              <a:buNone/>
-            </a:pPr>
-            <a:r>
-              <a:rPr b="0" i="0" lang="en-US" sz="1300" u="none" cap="none" strike="noStrike">
+              </a:solidFill>
+              <a:latin typeface="Calibri"/>
+              <a:ea typeface="Calibri"/>
+              <a:cs typeface="Calibri"/>
+              <a:sym typeface="Calibri"/>
+            </a:endParaRPr>
+          </a:p>
+          <a:p>
+            <a:pPr indent="0" lvl="0" marL="0" rtl="0" algn="l">
+              <a:spcBef>
+                <a:spcPts val="0"/>
+              </a:spcBef>
+              <a:spcAft>
+                <a:spcPts val="0"/>
+              </a:spcAft>
+              <a:buClr>
+                <a:schemeClr val="dk1"/>
+              </a:buClr>
+              <a:buSzPts val="1100"/>
+              <a:buFont typeface="Arial"/>
+              <a:buNone/>
+            </a:pPr>
+            <a:r>
+              <a:rPr lang="en-US" sz="1300">
                 <a:solidFill>
                   <a:srgbClr val="FFFFFF"/>
                 </a:solidFill>
@@ -6924,48 +7104,11 @@
                 <a:cs typeface="Calibri"/>
                 <a:sym typeface="Calibri"/>
               </a:rPr>
-              <a:t>The improvement is directional (+2.6 pp, 8 additional converters) and</a:t>
-            </a:r>
-            <a:endParaRPr b="0" i="0" sz="1300" u="none" cap="none" strike="noStrike">
-              <a:solidFill>
-                <a:schemeClr val="dk1"/>
-              </a:solidFill>
-              <a:latin typeface="Calibri"/>
-              <a:ea typeface="Calibri"/>
-              <a:cs typeface="Calibri"/>
-              <a:sym typeface="Calibri"/>
-            </a:endParaRPr>
-          </a:p>
-          <a:p>
-            <a:pPr indent="0" lvl="0" marL="0" marR="0" rtl="0" algn="l">
-              <a:spcBef>
-                <a:spcPts val="0"/>
-              </a:spcBef>
-              <a:spcAft>
-                <a:spcPts val="0"/>
-              </a:spcAft>
-              <a:buClr>
+              <a:t>consistent across capacity assumptions, though not statistically conclusive</a:t>
+            </a:r>
+            <a:endParaRPr sz="1300">
+              <a:solidFill>
                 <a:srgbClr val="FFFFFF"/>
-              </a:buClr>
-              <a:buSzPts val="1300"/>
-              <a:buFont typeface="Calibri"/>
-              <a:buNone/>
-            </a:pPr>
-            <a:r>
-              <a:rPr b="0" i="0" lang="en-US" sz="1300" u="none" cap="none" strike="noStrike">
-                <a:solidFill>
-                  <a:srgbClr val="FFFFFF"/>
-                </a:solidFill>
-                <a:latin typeface="Calibri"/>
-                <a:ea typeface="Calibri"/>
-                <a:cs typeface="Calibri"/>
-                <a:sym typeface="Calibri"/>
-              </a:rPr>
-              <a:t>consistent across capacity assumptions, though not statistically conclusive</a:t>
-            </a:r>
-            <a:endParaRPr b="0" i="0" sz="1300" u="none" cap="none" strike="noStrike">
-              <a:solidFill>
-                <a:schemeClr val="dk1"/>
               </a:solidFill>
               <a:latin typeface="Calibri"/>
               <a:ea typeface="Calibri"/>
@@ -6977,7 +7120,7 @@
       </p:sp>
       <p:sp>
         <p:nvSpPr>
-          <p:cNvPr id="204" name="Google Shape;204;p13"/>
+          <p:cNvPr id="205" name="Google Shape;205;p13"/>
           <p:cNvSpPr/>
           <p:nvPr/>
         </p:nvSpPr>
@@ -7020,7 +7163,7 @@
       </p:sp>
       <p:sp>
         <p:nvSpPr>
-          <p:cNvPr id="205" name="Google Shape;205;p13"/>
+          <p:cNvPr id="206" name="Google Shape;206;p13"/>
           <p:cNvSpPr/>
           <p:nvPr/>
         </p:nvSpPr>
@@ -7043,22 +7186,59 @@
           </a:bodyPr>
           <a:lstStyle/>
           <a:p>
-            <a:pPr indent="0" lvl="0" marL="0" marR="0" rtl="0" algn="l">
-              <a:spcBef>
-                <a:spcPts val="0"/>
-              </a:spcBef>
-              <a:spcAft>
-                <a:spcPts val="0"/>
-              </a:spcAft>
-              <a:buClr>
+            <a:pPr indent="0" lvl="0" marL="0" rtl="0" algn="l">
+              <a:spcBef>
+                <a:spcPts val="0"/>
+              </a:spcBef>
+              <a:spcAft>
+                <a:spcPts val="0"/>
+              </a:spcAft>
+              <a:buClr>
+                <a:schemeClr val="dk1"/>
+              </a:buClr>
+              <a:buSzPts val="1100"/>
+              <a:buFont typeface="Arial"/>
+              <a:buNone/>
+            </a:pPr>
+            <a:r>
+              <a:rPr lang="en-US" sz="1300">
+                <a:solidFill>
+                  <a:srgbClr val="FFFFFF"/>
+                </a:solidFill>
+                <a:latin typeface="Calibri"/>
+                <a:ea typeface="Calibri"/>
+                <a:cs typeface="Calibri"/>
+                <a:sym typeface="Calibri"/>
+              </a:rPr>
+              <a:t>The qualification layer complements rather than replaces the ML score -</a:t>
+            </a:r>
+            <a:endParaRPr sz="1300">
+              <a:solidFill>
                 <a:srgbClr val="FFFFFF"/>
-              </a:buClr>
-              <a:buSzPts val="1300"/>
-              <a:buFont typeface="Calibri"/>
-              <a:buNone/>
-            </a:pPr>
-            <a:r>
-              <a:rPr b="0" i="0" lang="en-US" sz="1300" u="none" cap="none" strike="noStrike">
+              </a:solidFill>
+              <a:latin typeface="Calibri"/>
+              <a:ea typeface="Calibri"/>
+              <a:cs typeface="Calibri"/>
+              <a:sym typeface="Calibri"/>
+            </a:endParaRPr>
+          </a:p>
+          <a:p>
+            <a:pPr indent="0" lvl="0" marL="0" rtl="0" algn="l">
+              <a:spcBef>
+                <a:spcPts val="0"/>
+              </a:spcBef>
+              <a:spcAft>
+                <a:spcPts val="0"/>
+              </a:spcAft>
+              <a:buClr>
+                <a:schemeClr val="dk1"/>
+              </a:buClr>
+              <a:buSzPts val="1100"/>
+              <a:buFont typeface="Arial"/>
+              <a:buNone/>
+            </a:pPr>
+            <a:r>
+              <a:rPr lang="en-US" sz="1300">
                 <a:solidFill>
                   <a:srgbClr val="FFFFFF"/>
                 </a:solidFill>
@@ -7067,60 +7247,11 @@
                 <a:cs typeface="Calibri"/>
                 <a:sym typeface="Calibri"/>
               </a:rPr>
-              <a:t>The qualification layer complements rather than replaces the ML score </a:t>
-            </a:r>
-            <a:r>
-              <a:rPr lang="en-US" sz="1300">
-                <a:solidFill>
-                  <a:srgbClr val="FFFFFF"/>
-                </a:solidFill>
-                <a:latin typeface="Calibri"/>
-                <a:ea typeface="Calibri"/>
-                <a:cs typeface="Calibri"/>
-                <a:sym typeface="Calibri"/>
-              </a:rPr>
-              <a:t>-</a:t>
-            </a:r>
-            <a:endParaRPr b="0" i="0" sz="1300" u="none" cap="none" strike="noStrike">
-              <a:solidFill>
-                <a:schemeClr val="dk1"/>
-              </a:solidFill>
-              <a:latin typeface="Calibri"/>
-              <a:ea typeface="Calibri"/>
-              <a:cs typeface="Calibri"/>
-              <a:sym typeface="Calibri"/>
-            </a:endParaRPr>
-          </a:p>
-          <a:p>
-            <a:pPr indent="0" lvl="0" marL="0" marR="0" rtl="0" algn="l">
-              <a:spcBef>
-                <a:spcPts val="0"/>
-              </a:spcBef>
-              <a:spcAft>
-                <a:spcPts val="0"/>
-              </a:spcAft>
-              <a:buClr>
+              <a:t>the tier locates high-conversion groups, the score filters within them</a:t>
+            </a:r>
+            <a:endParaRPr sz="1300">
+              <a:solidFill>
                 <a:srgbClr val="FFFFFF"/>
-              </a:buClr>
-              <a:buSzPts val="1300"/>
-              <a:buFont typeface="Calibri"/>
-              <a:buNone/>
-            </a:pPr>
-            <a:r>
-              <a:rPr b="0" i="0" lang="en-US" sz="1300" u="none" cap="none" strike="noStrike">
-                <a:solidFill>
-                  <a:srgbClr val="FFFFFF"/>
-                </a:solidFill>
-                <a:latin typeface="Calibri"/>
-                <a:ea typeface="Calibri"/>
-                <a:cs typeface="Calibri"/>
-                <a:sym typeface="Calibri"/>
-              </a:rPr>
-              <a:t>the tier locates high-conversion groups, the score filters within them</a:t>
-            </a:r>
-            <a:endParaRPr b="0" i="0" sz="1300" u="none" cap="none" strike="noStrike">
-              <a:solidFill>
-                <a:schemeClr val="dk1"/>
               </a:solidFill>
               <a:latin typeface="Calibri"/>
               <a:ea typeface="Calibri"/>
@@ -7132,7 +7263,7 @@
       </p:sp>
       <p:sp>
         <p:nvSpPr>
-          <p:cNvPr id="206" name="Google Shape;206;p13"/>
+          <p:cNvPr id="207" name="Google Shape;207;p13"/>
           <p:cNvSpPr/>
           <p:nvPr/>
         </p:nvSpPr>
@@ -7175,7 +7306,7 @@
       </p:sp>
       <p:sp>
         <p:nvSpPr>
-          <p:cNvPr id="207" name="Google Shape;207;p13"/>
+          <p:cNvPr id="208" name="Google Shape;208;p13"/>
           <p:cNvSpPr/>
           <p:nvPr/>
         </p:nvSpPr>
@@ -7275,7 +7406,7 @@
       </p:sp>
       <p:sp>
         <p:nvSpPr>
-          <p:cNvPr id="208" name="Google Shape;208;p13"/>
+          <p:cNvPr id="209" name="Google Shape;209;p13"/>
           <p:cNvSpPr/>
           <p:nvPr/>
         </p:nvSpPr>
@@ -7320,7 +7451,7 @@
       </p:sp>
       <p:sp>
         <p:nvSpPr>
-          <p:cNvPr id="209" name="Google Shape;209;p13"/>
+          <p:cNvPr id="210" name="Google Shape;210;p13"/>
           <p:cNvSpPr/>
           <p:nvPr/>
         </p:nvSpPr>
@@ -7401,7 +7532,7 @@
     </p:bg>
     <p:spTree>
       <p:nvGrpSpPr>
-        <p:cNvPr id="214" name="Shape 214"/>
+        <p:cNvPr id="215" name="Shape 215"/>
         <p:cNvGrpSpPr/>
         <p:nvPr/>
       </p:nvGrpSpPr>
@@ -7415,7 +7546,7 @@
       </p:grpSpPr>
       <p:pic>
         <p:nvPicPr>
-          <p:cNvPr descr="preencoded.png" id="215" name="Google Shape;215;p14"/>
+          <p:cNvPr descr="preencoded.png" id="216" name="Google Shape;216;p14"/>
           <p:cNvPicPr preferRelativeResize="0"/>
           <p:nvPr/>
         </p:nvPicPr>
@@ -7442,7 +7573,7 @@
       </p:pic>
       <p:sp>
         <p:nvSpPr>
-          <p:cNvPr id="216" name="Google Shape;216;p14"/>
+          <p:cNvPr id="217" name="Google Shape;217;p14"/>
           <p:cNvSpPr/>
           <p:nvPr/>
         </p:nvSpPr>
@@ -7505,7 +7636,7 @@
       </p:sp>
       <p:sp>
         <p:nvSpPr>
-          <p:cNvPr id="217" name="Google Shape;217;p14"/>
+          <p:cNvPr id="218" name="Google Shape;218;p14"/>
           <p:cNvSpPr/>
           <p:nvPr/>
         </p:nvSpPr>
@@ -7568,7 +7699,7 @@
       </p:sp>
       <p:sp>
         <p:nvSpPr>
-          <p:cNvPr id="218" name="Google Shape;218;p14"/>
+          <p:cNvPr id="219" name="Google Shape;219;p14"/>
           <p:cNvSpPr/>
           <p:nvPr/>
         </p:nvSpPr>
@@ -7792,7 +7923,7 @@
       </p:sp>
       <p:sp>
         <p:nvSpPr>
-          <p:cNvPr id="219" name="Google Shape;219;p14"/>
+          <p:cNvPr id="220" name="Google Shape;220;p14"/>
           <p:cNvSpPr/>
           <p:nvPr/>
         </p:nvSpPr>
@@ -7855,7 +7986,7 @@
       </p:sp>
       <p:sp>
         <p:nvSpPr>
-          <p:cNvPr id="220" name="Google Shape;220;p14"/>
+          <p:cNvPr id="221" name="Google Shape;221;p14"/>
           <p:cNvSpPr/>
           <p:nvPr/>
         </p:nvSpPr>
@@ -7983,7 +8114,7 @@
       </p:sp>
       <p:sp>
         <p:nvSpPr>
-          <p:cNvPr id="221" name="Google Shape;221;p14"/>
+          <p:cNvPr id="222" name="Google Shape;222;p14"/>
           <p:cNvSpPr/>
           <p:nvPr/>
         </p:nvSpPr>
@@ -8046,7 +8177,7 @@
       </p:sp>
       <p:sp>
         <p:nvSpPr>
-          <p:cNvPr id="222" name="Google Shape;222;p14"/>
+          <p:cNvPr id="223" name="Google Shape;223;p14"/>
           <p:cNvSpPr/>
           <p:nvPr/>
         </p:nvSpPr>
@@ -8418,7 +8549,7 @@
     </p:bg>
     <p:spTree>
       <p:nvGrpSpPr>
-        <p:cNvPr id="227" name="Shape 227"/>
+        <p:cNvPr id="228" name="Shape 228"/>
         <p:cNvGrpSpPr/>
         <p:nvPr/>
       </p:nvGrpSpPr>
@@ -8432,7 +8563,7 @@
       </p:grpSpPr>
       <p:sp>
         <p:nvSpPr>
-          <p:cNvPr id="228" name="Google Shape;228;p15"/>
+          <p:cNvPr id="229" name="Google Shape;229;p15"/>
           <p:cNvSpPr/>
           <p:nvPr/>
         </p:nvSpPr>
@@ -8495,7 +8626,7 @@
       </p:sp>
       <p:sp>
         <p:nvSpPr>
-          <p:cNvPr id="229" name="Google Shape;229;p15"/>
+          <p:cNvPr id="230" name="Google Shape;230;p15"/>
           <p:cNvSpPr/>
           <p:nvPr/>
         </p:nvSpPr>
@@ -8558,7 +8689,7 @@
       </p:sp>
       <p:cxnSp>
         <p:nvCxnSpPr>
-          <p:cNvPr id="230" name="Google Shape;230;p15"/>
+          <p:cNvPr id="231" name="Google Shape;231;p15"/>
           <p:cNvCxnSpPr/>
           <p:nvPr/>
         </p:nvCxnSpPr>
@@ -8584,7 +8715,7 @@
       </p:cxnSp>
       <p:sp>
         <p:nvSpPr>
-          <p:cNvPr id="231" name="Google Shape;231;p15"/>
+          <p:cNvPr id="232" name="Google Shape;232;p15"/>
           <p:cNvSpPr/>
           <p:nvPr/>
         </p:nvSpPr>
@@ -14249,7 +14380,31 @@
                 <a:cs typeface="Calibri"/>
                 <a:sym typeface="Calibri"/>
               </a:rPr>
-              <a:t>260 converters</a:t>
+              <a:t>26</a:t>
+            </a:r>
+            <a:r>
+              <a:rPr b="1" lang="en-US" sz="1200">
+                <a:solidFill>
+                  <a:srgbClr val="1E2761"/>
+                </a:solidFill>
+                <a:latin typeface="Calibri"/>
+                <a:ea typeface="Calibri"/>
+                <a:cs typeface="Calibri"/>
+                <a:sym typeface="Calibri"/>
+              </a:rPr>
+              <a:t>5</a:t>
+            </a:r>
+            <a:r>
+              <a:rPr b="1" i="0" lang="en-US" sz="1200" u="none" cap="none" strike="noStrike">
+                <a:solidFill>
+                  <a:srgbClr val="1E2761"/>
+                </a:solidFill>
+                <a:latin typeface="Calibri"/>
+                <a:ea typeface="Calibri"/>
+                <a:cs typeface="Calibri"/>
+                <a:sym typeface="Calibri"/>
+              </a:rPr>
+              <a:t> converters</a:t>
             </a:r>
             <a:endParaRPr b="0" i="0" sz="1200" u="none" cap="none" strike="noStrike">
               <a:solidFill>
@@ -14520,7 +14675,19 @@
                 <a:cs typeface="Calibri"/>
                 <a:sym typeface="Calibri"/>
               </a:rPr>
-              <a:t>Working Proffesionals</a:t>
+              <a:t>Working </a:t>
+            </a:r>
+            <a:r>
+              <a:rPr b="1" lang="en-US" sz="1100">
+                <a:solidFill>
+                  <a:srgbClr val="FFFFFF"/>
+                </a:solidFill>
+                <a:latin typeface="Calibri"/>
+                <a:ea typeface="Calibri"/>
+                <a:cs typeface="Calibri"/>
+                <a:sym typeface="Calibri"/>
+              </a:rPr>
+              <a:t>Professionals</a:t>
             </a:r>
             <a:endParaRPr b="0" i="0" sz="1100" u="none" cap="none" strike="noStrike">
               <a:solidFill>
@@ -14873,7 +15040,55 @@
                 <a:cs typeface="Calibri"/>
                 <a:sym typeface="Calibri"/>
               </a:rPr>
-              <a:t>268 converters (+8)</a:t>
+              <a:t>2</a:t>
+            </a:r>
+            <a:r>
+              <a:rPr b="1" lang="en-US" sz="1200">
+                <a:solidFill>
+                  <a:srgbClr val="E8593C"/>
+                </a:solidFill>
+                <a:latin typeface="Calibri"/>
+                <a:ea typeface="Calibri"/>
+                <a:cs typeface="Calibri"/>
+                <a:sym typeface="Calibri"/>
+              </a:rPr>
+              <a:t>70</a:t>
+            </a:r>
+            <a:r>
+              <a:rPr b="1" i="0" lang="en-US" sz="1200" u="none" cap="none" strike="noStrike">
+                <a:solidFill>
+                  <a:srgbClr val="E8593C"/>
+                </a:solidFill>
+                <a:latin typeface="Calibri"/>
+                <a:ea typeface="Calibri"/>
+                <a:cs typeface="Calibri"/>
+                <a:sym typeface="Calibri"/>
+              </a:rPr>
+              <a:t> converters (+</a:t>
+            </a:r>
+            <a:r>
+              <a:rPr b="1" lang="en-US" sz="1200">
+                <a:solidFill>
+                  <a:srgbClr val="E8593C"/>
+                </a:solidFill>
+                <a:latin typeface="Calibri"/>
+                <a:ea typeface="Calibri"/>
+                <a:cs typeface="Calibri"/>
+                <a:sym typeface="Calibri"/>
+              </a:rPr>
+              <a:t>5</a:t>
+            </a:r>
+            <a:r>
+              <a:rPr b="1" i="0" lang="en-US" sz="1200" u="none" cap="none" strike="noStrike">
+                <a:solidFill>
+                  <a:srgbClr val="E8593C"/>
+                </a:solidFill>
+                <a:latin typeface="Calibri"/>
+                <a:ea typeface="Calibri"/>
+                <a:cs typeface="Calibri"/>
+                <a:sym typeface="Calibri"/>
+              </a:rPr>
+              <a:t>)</a:t>
             </a:r>
             <a:endParaRPr b="0" i="0" sz="1200" u="none" cap="none" strike="noStrike">
               <a:solidFill>
@@ -16314,7 +16529,55 @@
                 <a:cs typeface="Calibri"/>
                 <a:sym typeface="Calibri"/>
               </a:rPr>
-              <a:t>+2.6 pp</a:t>
+              <a:t>+</a:t>
+            </a:r>
+            <a:r>
+              <a:rPr b="1" lang="en-US" sz="8000">
+                <a:solidFill>
+                  <a:srgbClr val="E8593C"/>
+                </a:solidFill>
+                <a:latin typeface="Calibri"/>
+                <a:ea typeface="Calibri"/>
+                <a:cs typeface="Calibri"/>
+                <a:sym typeface="Calibri"/>
+              </a:rPr>
+              <a:t>1</a:t>
+            </a:r>
+            <a:r>
+              <a:rPr b="1" i="0" lang="en-US" sz="8000" u="none" cap="none" strike="noStrike">
+                <a:solidFill>
+                  <a:srgbClr val="E8593C"/>
+                </a:solidFill>
+                <a:latin typeface="Calibri"/>
+                <a:ea typeface="Calibri"/>
+                <a:cs typeface="Calibri"/>
+                <a:sym typeface="Calibri"/>
+              </a:rPr>
+              <a:t>.</a:t>
+            </a:r>
+            <a:r>
+              <a:rPr b="1" lang="en-US" sz="8000">
+                <a:solidFill>
+                  <a:srgbClr val="E8593C"/>
+                </a:solidFill>
+                <a:latin typeface="Calibri"/>
+                <a:ea typeface="Calibri"/>
+                <a:cs typeface="Calibri"/>
+                <a:sym typeface="Calibri"/>
+              </a:rPr>
+              <a:t>7</a:t>
+            </a:r>
+            <a:r>
+              <a:rPr b="1" i="0" lang="en-US" sz="8000" u="none" cap="none" strike="noStrike">
+                <a:solidFill>
+                  <a:srgbClr val="E8593C"/>
+                </a:solidFill>
+                <a:latin typeface="Calibri"/>
+                <a:ea typeface="Calibri"/>
+                <a:cs typeface="Calibri"/>
+                <a:sym typeface="Calibri"/>
+              </a:rPr>
+              <a:t> pp</a:t>
             </a:r>
             <a:endParaRPr b="0" i="0" sz="8000" u="none" cap="none" strike="noStrike">
               <a:solidFill>
@@ -16377,7 +16640,31 @@
                 <a:cs typeface="Calibri"/>
                 <a:sym typeface="Calibri"/>
               </a:rPr>
-              <a:t>= 8 additional converters</a:t>
+              <a:t>= </a:t>
+            </a:r>
+            <a:r>
+              <a:rPr lang="en-US" sz="1600">
+                <a:solidFill>
+                  <a:srgbClr val="CADCFC"/>
+                </a:solidFill>
+                <a:latin typeface="Calibri"/>
+                <a:ea typeface="Calibri"/>
+                <a:cs typeface="Calibri"/>
+                <a:sym typeface="Calibri"/>
+              </a:rPr>
+              <a:t>5</a:t>
+            </a:r>
+            <a:r>
+              <a:rPr b="0" i="0" lang="en-US" sz="1600" u="none" cap="none" strike="noStrike">
+                <a:solidFill>
+                  <a:srgbClr val="CADCFC"/>
+                </a:solidFill>
+                <a:latin typeface="Calibri"/>
+                <a:ea typeface="Calibri"/>
+                <a:cs typeface="Calibri"/>
+                <a:sym typeface="Calibri"/>
+              </a:rPr>
+              <a:t> additional converters</a:t>
             </a:r>
             <a:endParaRPr b="0" i="0" sz="1600" u="none" cap="none" strike="noStrike">
               <a:solidFill>
@@ -16443,7 +16730,7 @@
             <a:tbl>
               <a:tblPr>
                 <a:noFill/>
-                <a:tableStyleId>{F59D0045-E51E-44DF-8F73-D67C288B57EF}</a:tableStyleId>
+                <a:tableStyleId>{510F0B6E-511E-4486-9144-9411189B104C}</a:tableStyleId>
               </a:tblPr>
               <a:tblGrid>
                 <a:gridCol w="1920250"/>
@@ -16806,7 +17093,55 @@
                           <a:cs typeface="Calibri"/>
                           <a:sym typeface="Calibri"/>
                         </a:rPr>
-                        <a:t>86.1%</a:t>
+                        <a:t>8</a:t>
+                      </a:r>
+                      <a:r>
+                        <a:rPr lang="en-US" sz="1300">
+                          <a:solidFill>
+                            <a:srgbClr val="FFFFFF"/>
+                          </a:solidFill>
+                          <a:latin typeface="Calibri"/>
+                          <a:ea typeface="Calibri"/>
+                          <a:cs typeface="Calibri"/>
+                          <a:sym typeface="Calibri"/>
+                        </a:rPr>
+                        <a:t>7</a:t>
+                      </a:r>
+                      <a:r>
+                        <a:rPr lang="en-US" sz="1300" u="none" cap="none" strike="noStrike">
+                          <a:solidFill>
+                            <a:srgbClr val="FFFFFF"/>
+                          </a:solidFill>
+                          <a:latin typeface="Calibri"/>
+                          <a:ea typeface="Calibri"/>
+                          <a:cs typeface="Calibri"/>
+                          <a:sym typeface="Calibri"/>
+                        </a:rPr>
+                        <a:t>.</a:t>
+                      </a:r>
+                      <a:r>
+                        <a:rPr lang="en-US" sz="1300">
+                          <a:solidFill>
+                            <a:srgbClr val="FFFFFF"/>
+                          </a:solidFill>
+                          <a:latin typeface="Calibri"/>
+                          <a:ea typeface="Calibri"/>
+                          <a:cs typeface="Calibri"/>
+                          <a:sym typeface="Calibri"/>
+                        </a:rPr>
+                        <a:t>7</a:t>
+                      </a:r>
+                      <a:r>
+                        <a:rPr lang="en-US" sz="1300" u="none" cap="none" strike="noStrike">
+                          <a:solidFill>
+                            <a:srgbClr val="FFFFFF"/>
+                          </a:solidFill>
+                          <a:latin typeface="Calibri"/>
+                          <a:ea typeface="Calibri"/>
+                          <a:cs typeface="Calibri"/>
+                          <a:sym typeface="Calibri"/>
+                        </a:rPr>
+                        <a:t>%</a:t>
                       </a:r>
                       <a:endParaRPr sz="1300" u="none" cap="none" strike="noStrike">
                         <a:latin typeface="Calibri"/>
@@ -17051,7 +17386,55 @@
                           <a:cs typeface="Calibri"/>
                           <a:sym typeface="Calibri"/>
                         </a:rPr>
-                        <a:t>88.7%</a:t>
+                        <a:t>8</a:t>
+                      </a:r>
+                      <a:r>
+                        <a:rPr b="1" lang="en-US" sz="1300">
+                          <a:solidFill>
+                            <a:srgbClr val="FFFFFF"/>
+                          </a:solidFill>
+                          <a:latin typeface="Calibri"/>
+                          <a:ea typeface="Calibri"/>
+                          <a:cs typeface="Calibri"/>
+                          <a:sym typeface="Calibri"/>
+                        </a:rPr>
+                        <a:t>9</a:t>
+                      </a:r>
+                      <a:r>
+                        <a:rPr b="1" lang="en-US" sz="1300" u="none" cap="none" strike="noStrike">
+                          <a:solidFill>
+                            <a:srgbClr val="FFFFFF"/>
+                          </a:solidFill>
+                          <a:latin typeface="Calibri"/>
+                          <a:ea typeface="Calibri"/>
+                          <a:cs typeface="Calibri"/>
+                          <a:sym typeface="Calibri"/>
+                        </a:rPr>
+                        <a:t>.</a:t>
+                      </a:r>
+                      <a:r>
+                        <a:rPr b="1" lang="en-US" sz="1300">
+                          <a:solidFill>
+                            <a:srgbClr val="FFFFFF"/>
+                          </a:solidFill>
+                          <a:latin typeface="Calibri"/>
+                          <a:ea typeface="Calibri"/>
+                          <a:cs typeface="Calibri"/>
+                          <a:sym typeface="Calibri"/>
+                        </a:rPr>
+                        <a:t>4</a:t>
+                      </a:r>
+                      <a:r>
+                        <a:rPr b="1" lang="en-US" sz="1300" u="none" cap="none" strike="noStrike">
+                          <a:solidFill>
+                            <a:srgbClr val="FFFFFF"/>
+                          </a:solidFill>
+                          <a:latin typeface="Calibri"/>
+                          <a:ea typeface="Calibri"/>
+                          <a:cs typeface="Calibri"/>
+                          <a:sym typeface="Calibri"/>
+                        </a:rPr>
+                        <a:t>%</a:t>
                       </a:r>
                       <a:endParaRPr sz="1300" u="none" cap="none" strike="noStrike">
                         <a:latin typeface="Calibri"/>
@@ -17132,7 +17515,31 @@
                           <a:cs typeface="Calibri"/>
                           <a:sym typeface="Calibri"/>
                         </a:rPr>
-                        <a:t>+2.6 pp</a:t>
+                        <a:t>+</a:t>
+                      </a:r>
+                      <a:r>
+                        <a:rPr b="1" lang="en-US" sz="1300">
+                          <a:solidFill>
+                            <a:srgbClr val="E8593C"/>
+                          </a:solidFill>
+                          <a:latin typeface="Calibri"/>
+                          <a:ea typeface="Calibri"/>
+                          <a:cs typeface="Calibri"/>
+                          <a:sym typeface="Calibri"/>
+                        </a:rPr>
+                        <a:t>1.7</a:t>
+                      </a:r>
+                      <a:r>
+                        <a:rPr b="1" lang="en-US" sz="1300" u="none" cap="none" strike="noStrike">
+                          <a:solidFill>
+                            <a:srgbClr val="E8593C"/>
+                          </a:solidFill>
+                          <a:latin typeface="Calibri"/>
+                          <a:ea typeface="Calibri"/>
+                          <a:cs typeface="Calibri"/>
+                          <a:sym typeface="Calibri"/>
+                        </a:rPr>
+                        <a:t> pp</a:t>
                       </a:r>
                       <a:endParaRPr sz="1300" u="none" cap="none" strike="noStrike">
                         <a:latin typeface="Calibri"/>
@@ -17296,7 +17703,31 @@
                           <a:cs typeface="Calibri"/>
                           <a:sym typeface="Calibri"/>
                         </a:rPr>
-                        <a:t>86.1%</a:t>
+                        <a:t>8</a:t>
+                      </a:r>
+                      <a:r>
+                        <a:rPr lang="en-US" sz="1300">
+                          <a:solidFill>
+                            <a:srgbClr val="FFFFFF"/>
+                          </a:solidFill>
+                          <a:latin typeface="Calibri"/>
+                          <a:ea typeface="Calibri"/>
+                          <a:cs typeface="Calibri"/>
+                          <a:sym typeface="Calibri"/>
+                        </a:rPr>
+                        <a:t>8</a:t>
+                      </a:r>
+                      <a:r>
+                        <a:rPr lang="en-US" sz="1300" u="none" cap="none" strike="noStrike">
+                          <a:solidFill>
+                            <a:srgbClr val="FFFFFF"/>
+                          </a:solidFill>
+                          <a:latin typeface="Calibri"/>
+                          <a:ea typeface="Calibri"/>
+                          <a:cs typeface="Calibri"/>
+                          <a:sym typeface="Calibri"/>
+                        </a:rPr>
+                        <a:t>.1%</a:t>
                       </a:r>
                       <a:endParaRPr sz="1300" u="none" cap="none" strike="noStrike">
                         <a:latin typeface="Calibri"/>
@@ -17377,7 +17808,31 @@
                           <a:cs typeface="Calibri"/>
                           <a:sym typeface="Calibri"/>
                         </a:rPr>
-                        <a:t>+0.0 pp</a:t>
+                        <a:t>+0.</a:t>
+                      </a:r>
+                      <a:r>
+                        <a:rPr lang="en-US" sz="1300">
+                          <a:solidFill>
+                            <a:srgbClr val="FFFFFF"/>
+                          </a:solidFill>
+                          <a:latin typeface="Calibri"/>
+                          <a:ea typeface="Calibri"/>
+                          <a:cs typeface="Calibri"/>
+                          <a:sym typeface="Calibri"/>
+                        </a:rPr>
+                        <a:t>3</a:t>
+                      </a:r>
+                      <a:r>
+                        <a:rPr lang="en-US" sz="1300" u="none" cap="none" strike="noStrike">
+                          <a:solidFill>
+                            <a:srgbClr val="FFFFFF"/>
+                          </a:solidFill>
+                          <a:latin typeface="Calibri"/>
+                          <a:ea typeface="Calibri"/>
+                          <a:cs typeface="Calibri"/>
+                          <a:sym typeface="Calibri"/>
+                        </a:rPr>
+                        <a:t>pp</a:t>
                       </a:r>
                       <a:endParaRPr sz="1300" u="none" cap="none" strike="noStrike">
                         <a:latin typeface="Calibri"/>
@@ -17534,6 +17989,43 @@
           </a:bodyPr>
           <a:lstStyle/>
           <a:p>
+            <a:pPr indent="0" lvl="0" marL="0" rtl="0" algn="l">
+              <a:spcBef>
+                <a:spcPts val="0"/>
+              </a:spcBef>
+              <a:spcAft>
+                <a:spcPts val="0"/>
+              </a:spcAft>
+              <a:buClr>
+                <a:schemeClr val="dk1"/>
+              </a:buClr>
+              <a:buSzPts val="1100"/>
+              <a:buFont typeface="Arial"/>
+              <a:buNone/>
+            </a:pPr>
+            <a:r>
+              <a:rPr i="1" lang="en-US" sz="1300">
+                <a:solidFill>
+                  <a:srgbClr val="64748B"/>
+                </a:solidFill>
+                <a:latin typeface="Calibri"/>
+                <a:ea typeface="Calibri"/>
+                <a:cs typeface="Calibri"/>
+                <a:sym typeface="Calibri"/>
+              </a:rPr>
+              <a:t>S3 improved slightly (+0.3pp), suggesting the qualification signal itself contains useful information.</a:t>
+            </a:r>
+            <a:endParaRPr i="1" sz="1300">
+              <a:solidFill>
+                <a:srgbClr val="64748B"/>
+              </a:solidFill>
+              <a:latin typeface="Calibri"/>
+              <a:ea typeface="Calibri"/>
+              <a:cs typeface="Calibri"/>
+              <a:sym typeface="Calibri"/>
+            </a:endParaRPr>
+          </a:p>
+          <a:p>
             <a:pPr indent="0" lvl="0" marL="0" marR="0" rtl="0" algn="l">
               <a:spcBef>
                 <a:spcPts val="0"/>
@@ -17549,7 +18041,7 @@
               <a:buNone/>
             </a:pPr>
             <a:r>
-              <a:rPr b="0" i="1" lang="en-US" sz="1300" u="none" cap="none" strike="noStrike">
+              <a:rPr i="1" lang="en-US" sz="1300">
                 <a:solidFill>
                   <a:srgbClr val="64748B"/>
                 </a:solidFill>
@@ -17558,48 +18050,11 @@
                 <a:cs typeface="Calibri"/>
                 <a:sym typeface="Calibri"/>
               </a:rPr>
-              <a:t>S3 shows the gain comes from the tier allocation mechanism,</a:t>
-            </a:r>
-            <a:endParaRPr b="0" i="0" sz="1300" u="none" cap="none" strike="noStrike">
-              <a:solidFill>
-                <a:schemeClr val="dk1"/>
-              </a:solidFill>
-              <a:latin typeface="Calibri"/>
-              <a:ea typeface="Calibri"/>
-              <a:cs typeface="Calibri"/>
-              <a:sym typeface="Calibri"/>
-            </a:endParaRPr>
-          </a:p>
-          <a:p>
-            <a:pPr indent="0" lvl="0" marL="0" marR="0" rtl="0" algn="l">
-              <a:spcBef>
-                <a:spcPts val="0"/>
-              </a:spcBef>
-              <a:spcAft>
-                <a:spcPts val="0"/>
-              </a:spcAft>
-              <a:buClr>
+              <a:t>However, the much larger gain from System 2 shows that the prioritisation mechanism matters more than the signal alone.</a:t>
+            </a:r>
+            <a:endParaRPr i="1" sz="1300">
+              <a:solidFill>
                 <a:srgbClr val="64748B"/>
-              </a:buClr>
-              <a:buSzPts val="1300"/>
-              <a:buFont typeface="Calibri"/>
-              <a:buNone/>
-            </a:pPr>
-            <a:r>
-              <a:rPr b="0" i="1" lang="en-US" sz="1300" u="none" cap="none" strike="noStrike">
-                <a:solidFill>
-                  <a:srgbClr val="64748B"/>
-                </a:solidFill>
-                <a:latin typeface="Calibri"/>
-                <a:ea typeface="Calibri"/>
-                <a:cs typeface="Calibri"/>
-                <a:sym typeface="Calibri"/>
-              </a:rPr>
-              <a:t>not just the qualification information itself.</a:t>
-            </a:r>
-            <a:endParaRPr b="0" i="0" sz="1300" u="none" cap="none" strike="noStrike">
-              <a:solidFill>
-                <a:schemeClr val="dk1"/>
               </a:solidFill>
               <a:latin typeface="Calibri"/>
               <a:ea typeface="Calibri"/>
